--- a/data-mart-platform-v7.pptx
+++ b/data-mart-platform-v7.pptx
@@ -5,12 +5,13 @@
     <p:sldMasterId id="2147483648" r:id="rId1"/>
   </p:sldMasterIdLst>
   <p:notesMasterIdLst>
-    <p:notesMasterId r:id="rId5"/>
+    <p:notesMasterId r:id="rId6"/>
   </p:notesMasterIdLst>
   <p:sldIdLst>
-    <p:sldId id="259" r:id="rId2"/>
-    <p:sldId id="260" r:id="rId3"/>
-    <p:sldId id="256" r:id="rId4"/>
+    <p:sldId id="261" r:id="rId2"/>
+    <p:sldId id="259" r:id="rId3"/>
+    <p:sldId id="260" r:id="rId4"/>
+    <p:sldId id="256" r:id="rId5"/>
   </p:sldIdLst>
   <p:sldSz cx="12192000" cy="6858000"/>
   <p:notesSz cx="6858000" cy="12192000"/>
@@ -311,7 +312,7 @@
           <a:p>
             <a:fld id="{F7021451-1387-4CA6-816F-3879F97B5CBC}" type="slidenum">
               <a:rPr lang="en-US"/>
-              <a:t>3</a:t>
+              <a:t>4</a:t>
             </a:fld>
             <a:endParaRPr lang="en-US"/>
           </a:p>
@@ -645,6 +646,14 @@
 <file path=ppt/slides/slide1.xml><?xml version="1.0" encoding="utf-8"?>
 <p:sld xmlns:a="http://schemas.openxmlformats.org/drawingml/2006/main" xmlns:r="http://schemas.openxmlformats.org/officeDocument/2006/relationships" xmlns:p="http://schemas.openxmlformats.org/presentationml/2006/main">
   <p:cSld>
+    <p:bg>
+      <p:bgPr>
+        <a:solidFill>
+          <a:schemeClr val="bg1"/>
+        </a:solidFill>
+        <a:effectLst/>
+      </p:bgPr>
+    </p:bg>
     <p:spTree>
       <p:nvGrpSpPr>
         <p:cNvPr id="1" name=""/>
@@ -659,6 +668,67 @@
           <a:chExt cx="0" cy="0"/>
         </a:xfrm>
       </p:grpSpPr>
+      <p:pic>
+        <p:nvPicPr>
+          <p:cNvPr id="4" name="Picture 3">
+            <a:extLst>
+              <a:ext uri="{FF2B5EF4-FFF2-40B4-BE49-F238E27FC236}">
+                <a16:creationId xmlns:a16="http://schemas.microsoft.com/office/drawing/2014/main" id="{F94844AF-86F0-FE33-E45B-CCF882FB67E3}"/>
+              </a:ext>
+            </a:extLst>
+          </p:cNvPr>
+          <p:cNvPicPr>
+            <a:picLocks noChangeAspect="1"/>
+          </p:cNvPicPr>
+          <p:nvPr/>
+        </p:nvPicPr>
+        <p:blipFill>
+          <a:blip r:embed="rId2"/>
+          <a:srcRect t="4155" r="-2" b="11620"/>
+          <a:stretch>
+            <a:fillRect/>
+          </a:stretch>
+        </p:blipFill>
+        <p:spPr>
+          <a:xfrm>
+            <a:off x="-6588" y="10"/>
+            <a:ext cx="12198588" cy="6857990"/>
+          </a:xfrm>
+          <a:prstGeom prst="rect">
+            <a:avLst/>
+          </a:prstGeom>
+        </p:spPr>
+      </p:pic>
+    </p:spTree>
+    <p:extLst>
+      <p:ext uri="{BB962C8B-B14F-4D97-AF65-F5344CB8AC3E}">
+        <p14:creationId xmlns:p14="http://schemas.microsoft.com/office/powerpoint/2010/main" val="3175273880"/>
+      </p:ext>
+    </p:extLst>
+  </p:cSld>
+  <p:clrMapOvr>
+    <a:masterClrMapping/>
+  </p:clrMapOvr>
+</p:sld>
+</file>
+
+<file path=ppt/slides/slide2.xml><?xml version="1.0" encoding="utf-8"?>
+<p:sld xmlns:a="http://schemas.openxmlformats.org/drawingml/2006/main" xmlns:r="http://schemas.openxmlformats.org/officeDocument/2006/relationships" xmlns:p="http://schemas.openxmlformats.org/presentationml/2006/main">
+  <p:cSld>
+    <p:spTree>
+      <p:nvGrpSpPr>
+        <p:cNvPr id="1" name=""/>
+        <p:cNvGrpSpPr/>
+        <p:nvPr/>
+      </p:nvGrpSpPr>
+      <p:grpSpPr>
+        <a:xfrm>
+          <a:off x="0" y="0"/>
+          <a:ext cx="0" cy="0"/>
+          <a:chOff x="0" y="0"/>
+          <a:chExt cx="0" cy="0"/>
+        </a:xfrm>
+      </p:grpSpPr>
       <p:sp>
         <p:nvSpPr>
           <p:cNvPr id="2" name="TextBox 1"/>
@@ -1204,7 +1274,7 @@
         <p:spPr>
           <a:xfrm>
             <a:off x="4526280" y="2057400"/>
-            <a:ext cx="3136392" cy="274320"/>
+            <a:ext cx="3136392" cy="184666"/>
           </a:xfrm>
           <a:prstGeom prst="rect">
             <a:avLst/>
@@ -1229,7 +1299,25 @@
                 </a:solidFill>
                 <a:latin typeface="Calibri"/>
               </a:rPr>
-              <a:t>Data organized by business unit</a:t>
+              <a:t>Data organized by</a:t>
+            </a:r>
+            <a:r>
+              <a:rPr lang="en-US" sz="1200" b="0" i="1" dirty="0">
+                <a:solidFill>
+                  <a:srgbClr val="555555"/>
+                </a:solidFill>
+                <a:latin typeface="Calibri"/>
+              </a:rPr>
+              <a:t> consumable</a:t>
+            </a:r>
+            <a:r>
+              <a:rPr sz="1200" b="0" i="1" dirty="0">
+                <a:solidFill>
+                  <a:srgbClr val="555555"/>
+                </a:solidFill>
+                <a:latin typeface="Calibri"/>
+              </a:rPr>
+              <a:t> business unit</a:t>
             </a:r>
           </a:p>
         </p:txBody>
@@ -3540,7 +3628,7 @@
 </p:sld>
 </file>
 
-<file path=ppt/slides/slide2.xml><?xml version="1.0" encoding="utf-8"?>
+<file path=ppt/slides/slide3.xml><?xml version="1.0" encoding="utf-8"?>
 <p:sld xmlns:a="http://schemas.openxmlformats.org/drawingml/2006/main" xmlns:r="http://schemas.openxmlformats.org/officeDocument/2006/relationships" xmlns:p="http://schemas.openxmlformats.org/presentationml/2006/main">
   <p:cSld>
     <p:spTree>
@@ -5182,7 +5270,7 @@
 </p:sld>
 </file>
 
-<file path=ppt/slides/slide3.xml><?xml version="1.0" encoding="utf-8"?>
+<file path=ppt/slides/slide4.xml><?xml version="1.0" encoding="utf-8"?>
 <p:sld xmlns:a="http://schemas.openxmlformats.org/drawingml/2006/main" xmlns:r="http://schemas.openxmlformats.org/officeDocument/2006/relationships" xmlns:p="http://schemas.openxmlformats.org/presentationml/2006/main">
   <p:cSld name="Slide 1">
     <p:bg>
